--- a/dist/요한복음_1강_말씀과_창조_2장.pptx
+++ b/dist/요한복음_1강_말씀과_창조_2장.pptx
@@ -108,7 +108,7 @@
   <p:extLst>
     <p:ext uri="{521415D9-36F7-43E2-AB2F-B90AF26B5E84}">
       <p14:sectionLst xmlns:p14="http://schemas.microsoft.com/office/powerpoint/2010/main">
-        <p14:section name="1과 · 하나님에 대한 증언" id="{3b3ebd5e-b156-a525-e5f6-5255bb8b3cbb}">
+        <p14:section name="1과 · 하나님에 대한 증언" id="{e6f93b1f-81e2-84ec-3822-276c2ab4a05e}">
           <p14:sldIdLst>
             <p14:sldId id="256"/>
             <p14:sldId id="257"/>
@@ -518,7 +518,7 @@
           <a:p>
             <a:r>
               <a:rPr lang="en-US" dirty="0"/>
-              <a:t>세 카드는 나란한 이유가 아니라 순서입니다. 보내심(전제) → 알려주심(사역) → 떠오르게 하심(결과). ‘말씀’이라는 단어에는 반드시 말한 이가 전제됩니다 — 요한복음은 ‘나를 보내신 아버지’를 40번 넘게 씁니다 (6:38, 17:3).</a:t>
+              <a:t>세 카드는 나란한 이유가 아니라 순서입니다 — 나오심(전제) → 알려주심(사역) → 떠오르게 하심(결과). ‘말씀’이라는 단어에는 반드시 말한 이가 전제됩니다. ‘보내심 받은’도 요한의 표현이지만(40회 이상), 그 말만 쓰면 선지자·사도와 같은 급으로 들립니다. 요한은 ‘보내심’을 쓸 때마다 어디서 왔는지를 붙여 그 오해를 막습니다 — 16:28 아버지에게서 나와, 6:38 하늘에서 내려온, 3:13 하늘에서 내려온 자, 17:5 창세 전에 가졌던 영화. 선지자는 태어나서 보내심을 받고, 예수님은 계시다가 오셨습니다.</a:t>
             </a:r>
             <a:endParaRPr lang="en-US" dirty="0"/>
           </a:p>
@@ -2407,12 +2407,12 @@
         </p:nvSpPr>
         <p:spPr>
           <a:xfrm>
-            <a:off x="685800" y="3310128"/>
-            <a:ext cx="3448202" cy="2103120"/>
+            <a:off x="685800" y="3273552"/>
+            <a:ext cx="3448202" cy="2286000"/>
           </a:xfrm>
           <a:prstGeom prst="roundRect">
             <a:avLst>
-              <a:gd name="adj" fmla="val 2609"/>
+              <a:gd name="adj" fmla="val 2400"/>
             </a:avLst>
           </a:prstGeom>
           <a:solidFill>
@@ -2436,7 +2436,7 @@
         </p:nvSpPr>
         <p:spPr>
           <a:xfrm>
-            <a:off x="923544" y="3547872"/>
+            <a:off x="923544" y="3511296"/>
             <a:ext cx="2972714" cy="640080"/>
           </a:xfrm>
           <a:prstGeom prst="rect">
@@ -2461,7 +2461,7 @@
                 <a:ea typeface="맑은 고딕" pitchFamily="34" charset="-122"/>
                 <a:cs typeface="맑은 고딕" pitchFamily="34" charset="-120"/>
               </a:rPr>
-              <a:t>보내심 받은 분이므로</a:t>
+              <a:t>아버지에게서 나오셨으므로</a:t>
             </a:r>
             <a:endParaRPr lang="en-US" sz="2000" dirty="0"/>
           </a:p>
@@ -2475,8 +2475,8 @@
         </p:nvSpPr>
         <p:spPr>
           <a:xfrm>
-            <a:off x="923544" y="4261104"/>
-            <a:ext cx="2972714" cy="914400"/>
+            <a:off x="923544" y="4224528"/>
+            <a:ext cx="2972714" cy="1097280"/>
           </a:xfrm>
           <a:prstGeom prst="rect">
             <a:avLst/>
@@ -2503,7 +2503,7 @@
                 <a:ea typeface="맑은 고딕" pitchFamily="34" charset="-122"/>
                 <a:cs typeface="맑은 고딕" pitchFamily="34" charset="-120"/>
               </a:rPr>
-              <a:t>말씀에는 반드시</a:t>
+              <a:t>말씀에는 반드시 말한 이가 있다</a:t>
             </a:r>
             <a:endParaRPr lang="en-US" sz="1700" dirty="0"/>
           </a:p>
@@ -2523,7 +2523,7 @@
                 <a:ea typeface="맑은 고딕" pitchFamily="34" charset="-122"/>
                 <a:cs typeface="맑은 고딕" pitchFamily="34" charset="-120"/>
               </a:rPr>
-              <a:t>말한 이가 있다</a:t>
+              <a:t>“내가 아버지에게서 나와</a:t>
             </a:r>
             <a:endParaRPr lang="en-US" sz="1700" dirty="0"/>
           </a:p>
@@ -2543,7 +2543,7 @@
                 <a:ea typeface="맑은 고딕" pitchFamily="34" charset="-122"/>
                 <a:cs typeface="맑은 고딕" pitchFamily="34" charset="-120"/>
               </a:rPr>
-              <a:t>→ 아버지가 보내신 분</a:t>
+              <a:t>세상에 왔고” (16:28)</a:t>
             </a:r>
             <a:endParaRPr lang="en-US" sz="1700" dirty="0"/>
           </a:p>
@@ -2557,12 +2557,12 @@
         </p:nvSpPr>
         <p:spPr>
           <a:xfrm>
-            <a:off x="4371746" y="3310128"/>
-            <a:ext cx="3448202" cy="2103120"/>
+            <a:off x="4371746" y="3273552"/>
+            <a:ext cx="3448202" cy="2286000"/>
           </a:xfrm>
           <a:prstGeom prst="roundRect">
             <a:avLst>
-              <a:gd name="adj" fmla="val 2609"/>
+              <a:gd name="adj" fmla="val 2400"/>
             </a:avLst>
           </a:prstGeom>
           <a:solidFill>
@@ -2586,7 +2586,7 @@
         </p:nvSpPr>
         <p:spPr>
           <a:xfrm>
-            <a:off x="4609490" y="3547872"/>
+            <a:off x="4609490" y="3511296"/>
             <a:ext cx="2972714" cy="640080"/>
           </a:xfrm>
           <a:prstGeom prst="rect">
@@ -2625,8 +2625,8 @@
         </p:nvSpPr>
         <p:spPr>
           <a:xfrm>
-            <a:off x="4609490" y="4261104"/>
-            <a:ext cx="2972714" cy="914400"/>
+            <a:off x="4609490" y="4224528"/>
+            <a:ext cx="2972714" cy="1097280"/>
           </a:xfrm>
           <a:prstGeom prst="rect">
             <a:avLst/>
@@ -2687,12 +2687,12 @@
         </p:nvSpPr>
         <p:spPr>
           <a:xfrm>
-            <a:off x="8057693" y="3310128"/>
-            <a:ext cx="3448202" cy="2103120"/>
+            <a:off x="8057693" y="3273552"/>
+            <a:ext cx="3448202" cy="2286000"/>
           </a:xfrm>
           <a:prstGeom prst="roundRect">
             <a:avLst>
-              <a:gd name="adj" fmla="val 2609"/>
+              <a:gd name="adj" fmla="val 2400"/>
             </a:avLst>
           </a:prstGeom>
           <a:solidFill>
@@ -2716,7 +2716,7 @@
         </p:nvSpPr>
         <p:spPr>
           <a:xfrm>
-            <a:off x="8295437" y="3547872"/>
+            <a:off x="8295437" y="3511296"/>
             <a:ext cx="2972714" cy="640080"/>
           </a:xfrm>
           <a:prstGeom prst="rect">
@@ -2755,8 +2755,8 @@
         </p:nvSpPr>
         <p:spPr>
           <a:xfrm>
-            <a:off x="8295437" y="4261104"/>
-            <a:ext cx="2972714" cy="914400"/>
+            <a:off x="8295437" y="4224528"/>
+            <a:ext cx="2972714" cy="1097280"/>
           </a:xfrm>
           <a:prstGeom prst="rect">
             <a:avLst/>
@@ -2817,7 +2817,7 @@
         </p:nvSpPr>
         <p:spPr>
           <a:xfrm>
-            <a:off x="685800" y="5614416"/>
+            <a:off x="685800" y="5760720"/>
             <a:ext cx="10820095" cy="384048"/>
           </a:xfrm>
           <a:prstGeom prst="rect">
